--- a/examples/practice/실습_사회_수요와공급.pptx
+++ b/examples/practice/실습_사회_수요와공급.pptx
@@ -513,7 +513,7 @@
           <a:lstStyle/>
           <a:p>
             <a:r>
-              <a:t>가격은 한 사람이 정하는 것이 아니라 사려는 사람과 팔려는 사람이 만나서 정해진다는 데로 이끈다.</a:t>
+              <a:t>가격은 한 사람이 정하는 것이 아니라 사려는 사람과 팔려는 사람이 만나서 정해진다는 생각으로 이끈다.</a:t>
             </a:r>
           </a:p>
         </p:txBody>
@@ -583,7 +583,7 @@
           <a:lstStyle/>
           <a:p>
             <a:r>
-              <a:t>초과 수요일 때는 사려는 사람끼리 경쟁해서, 초과 공급일 때는 팔려는 사람끼리 경쟁해서 가격이 움직인다.</a:t>
+              <a:t>초과 수요일 때는 사려는 사람끼리, 초과 공급일 때는 팔려는 사람끼리 경쟁해서 가격이 움직인다.</a:t>
             </a:r>
           </a:p>
         </p:txBody>
@@ -653,7 +653,7 @@
           <a:lstStyle/>
           <a:p>
             <a:r>
-              <a:t>가격이 바뀌어 수요량·공급량이 움직이는 것과, 가격 말고 다른 요인이 바뀌어 수요·공급 자체가 바뀌는 것을 구분한다.</a:t>
+              <a:t>가격이 바뀌면 수요량·공급량이 움직인다. 가격 말고 다른 요인이 바뀌면 수요·공급 자체가 바뀐다. 이 둘을 구분한다.</a:t>
             </a:r>
           </a:p>
         </p:txBody>
@@ -5551,7 +5551,7 @@
                 <a:ea typeface="맑은 고딕"/>
                 <a:cs typeface="맑은 고딕"/>
               </a:rPr>
-              <a:t>• 수요 법칙: 가격이 오르면 수요량이 줄어들고, 가격이 내리면 수요량이 늘어난다.</a:t>
+              <a:t>• 수요 법칙: 가격이 오르면 수요량이 줄어들고 가격이 내리면 수요량이 늘어난다.</a:t>
             </a:r>
           </a:p>
           <a:p>
@@ -5802,7 +5802,7 @@
                 <a:ea typeface="맑은 고딕"/>
                 <a:cs typeface="맑은 고딕"/>
               </a:rPr>
-              <a:t>• 공급 법칙: 가격이 오르면 공급량이 늘어나고, 가격이 내리면 공급량이 줄어든다.</a:t>
+              <a:t>• 공급 법칙: 가격이 오르면 공급량이 늘어나고 가격이 내리면 공급량이 줄어든다.</a:t>
             </a:r>
           </a:p>
         </p:txBody>
